--- a/toudai_work/取り組み④_東大推薦スコアの妥当性.pptx
+++ b/toudai_work/取り組み④_東大推薦スコアの妥当性.pptx
@@ -9,10 +9,9 @@
     <p:sldId id="257" r:id="rId3"/>
     <p:sldId id="258" r:id="rId4"/>
     <p:sldId id="259" r:id="rId5"/>
-    <p:sldId id="260" r:id="rId6"/>
   </p:sldIdLst>
   <p:notesMasterIdLst>
-    <p:notesMasterId r:id="rId7"/>
+    <p:notesMasterId r:id="rId6"/>
   </p:notesMasterIdLst>
   <p:sldSz cx="12191695" cy="6858000"/>
   <p:notesSz cx="6858000" cy="12191695"/>
@@ -812,94 +811,6 @@
 </p:notes>
 </file>
 
-<file path=ppt/notesSlides/notesSlide5.xml><?xml version="1.0" encoding="utf-8"?>
-<p:notes xmlns:a="http://schemas.openxmlformats.org/drawingml/2006/main" xmlns:r="http://schemas.openxmlformats.org/officeDocument/2006/relationships" xmlns:p="http://schemas.openxmlformats.org/presentationml/2006/main">
-  <p:cSld>
-    <p:spTree>
-      <p:nvGrpSpPr>
-        <p:cNvPr id="1" name=""/>
-        <p:cNvGrpSpPr/>
-        <p:nvPr/>
-      </p:nvGrpSpPr>
-      <p:grpSpPr>
-        <a:xfrm>
-          <a:off x="0" y="0"/>
-          <a:ext cx="0" cy="0"/>
-          <a:chOff x="0" y="0"/>
-          <a:chExt cx="0" cy="0"/>
-        </a:xfrm>
-      </p:grpSpPr>
-      <p:sp>
-        <p:nvSpPr>
-          <p:cNvPr id="2" name="Slide Image Placeholder 1"/>
-          <p:cNvSpPr>
-            <a:spLocks noGrp="1" noRot="1" noChangeAspect="1"/>
-          </p:cNvSpPr>
-          <p:nvPr>
-            <p:ph type="sldImg"/>
-          </p:nvPr>
-        </p:nvSpPr>
-        <p:spPr/>
-      </p:sp>
-      <p:sp>
-        <p:nvSpPr>
-          <p:cNvPr id="3" name="Notes Placeholder 2"/>
-          <p:cNvSpPr>
-            <a:spLocks noGrp="1"/>
-          </p:cNvSpPr>
-          <p:nvPr>
-            <p:ph type="body" idx="1"/>
-          </p:nvPr>
-        </p:nvSpPr>
-        <p:spPr/>
-        <p:txBody>
-          <a:bodyPr/>
-          <a:lstStyle/>
-          <a:p>
-            <a:r>
-              <a:rPr lang="en-US" dirty="0"/>
-              <a:t/>
-            </a:r>
-            <a:endParaRPr lang="en-US" dirty="0"/>
-          </a:p>
-        </p:txBody>
-      </p:sp>
-      <p:sp>
-        <p:nvSpPr>
-          <p:cNvPr id="4" name="Slide Number Placeholder 3"/>
-          <p:cNvSpPr>
-            <a:spLocks noGrp="1"/>
-          </p:cNvSpPr>
-          <p:nvPr>
-            <p:ph type="sldNum" sz="quarter" idx="10"/>
-          </p:nvPr>
-        </p:nvSpPr>
-        <p:spPr/>
-        <p:txBody>
-          <a:bodyPr/>
-          <a:lstStyle/>
-          <a:p>
-            <a:fld id="{F7021451-1387-4CA6-816F-3879F97B5CBC}" type="slidenum">
-              <a:rPr lang="en-US"/>
-              <a:t>5</a:t>
-            </a:fld>
-            <a:endParaRPr lang="en-US"/>
-          </a:p>
-        </p:txBody>
-      </p:sp>
-    </p:spTree>
-    <p:extLst>
-      <p:ext uri="{BB962C8B-B14F-4D97-AF65-F5344CB8AC3E}">
-        <p14:creationId xmlns:p14="http://schemas.microsoft.com/office/powerpoint/2010/main" val="1024086991"/>
-      </p:ext>
-    </p:extLst>
-  </p:cSld>
-  <p:clrMapOvr>
-    <a:masterClrMapping/>
-  </p:clrMapOvr>
-</p:notes>
-</file>
-
 <file path=ppt/slideLayouts/slideLayout1.xml><?xml version="1.0" encoding="utf-8"?>
 <p:sldLayout xmlns:a="http://schemas.openxmlformats.org/drawingml/2006/main" xmlns:r="http://schemas.openxmlformats.org/officeDocument/2006/relationships" xmlns:p="http://schemas.openxmlformats.org/presentationml/2006/main" preserve="1">
   <p:cSld name="DEFAULT">
@@ -1239,14 +1150,14 @@
         </p:nvSpPr>
         <p:spPr>
           <a:xfrm>
-            <a:off x="0" y="0"/>
-            <a:ext cx="12191695" cy="6858000"/>
-          </a:xfrm>
-          <a:prstGeom prst="rect">
-            <a:avLst/>
-          </a:prstGeom>
-          <a:solidFill>
-            <a:srgbClr val="FFFFFF"/>
+            <a:off x="0" y="5074920"/>
+            <a:ext cx="12191695" cy="1783080"/>
+          </a:xfrm>
+          <a:prstGeom prst="rect">
+            <a:avLst/>
+          </a:prstGeom>
+          <a:solidFill>
+            <a:srgbClr val="E7F1EE"/>
           </a:solidFill>
           <a:ln/>
         </p:spPr>
@@ -1259,26 +1170,6 @@
         </p:nvSpPr>
         <p:spPr>
           <a:xfrm>
-            <a:off x="0" y="5074920"/>
-            <a:ext cx="12191695" cy="1783080"/>
-          </a:xfrm>
-          <a:prstGeom prst="rect">
-            <a:avLst/>
-          </a:prstGeom>
-          <a:solidFill>
-            <a:srgbClr val="E7F1EE"/>
-          </a:solidFill>
-          <a:ln/>
-        </p:spPr>
-      </p:sp>
-      <p:sp>
-        <p:nvSpPr>
-          <p:cNvPr id="4" name="Shape 2"/>
-          <p:cNvSpPr/>
-          <p:nvPr/>
-        </p:nvSpPr>
-        <p:spPr>
-          <a:xfrm>
             <a:off x="0" y="0"/>
             <a:ext cx="12191695" cy="201168"/>
           </a:xfrm>
@@ -1293,7 +1184,7 @@
       </p:sp>
       <p:sp>
         <p:nvSpPr>
-          <p:cNvPr id="5" name="Text 3"/>
+          <p:cNvPr id="4" name="Text 2"/>
           <p:cNvSpPr/>
           <p:nvPr/>
         </p:nvSpPr>
@@ -1332,7 +1223,7 @@
       </p:sp>
       <p:sp>
         <p:nvSpPr>
-          <p:cNvPr id="6" name="Text 4"/>
+          <p:cNvPr id="5" name="Text 3"/>
           <p:cNvSpPr/>
           <p:nvPr/>
         </p:nvSpPr>
@@ -1371,7 +1262,7 @@
       </p:sp>
       <p:sp>
         <p:nvSpPr>
-          <p:cNvPr id="7" name="Text 5"/>
+          <p:cNvPr id="6" name="Text 4"/>
           <p:cNvSpPr/>
           <p:nvPr/>
         </p:nvSpPr>
@@ -1430,7 +1321,7 @@
       </p:sp>
       <p:sp>
         <p:nvSpPr>
-          <p:cNvPr id="8" name="Text 6"/>
+          <p:cNvPr id="7" name="Text 5"/>
           <p:cNvSpPr/>
           <p:nvPr/>
         </p:nvSpPr>
@@ -1469,7 +1360,7 @@
       </p:sp>
       <p:sp>
         <p:nvSpPr>
-          <p:cNvPr id="9" name="Text 7"/>
+          <p:cNvPr id="8" name="Text 6"/>
           <p:cNvSpPr/>
           <p:nvPr/>
         </p:nvSpPr>
@@ -1927,7 +1818,7 @@
                 <a:ea typeface="ヒラギノ角ゴシック W3" pitchFamily="34" charset="-122"/>
                 <a:cs typeface="ヒラギノ角ゴシック W3" pitchFamily="34" charset="-120"/>
               </a:rPr>
-              <a:t>出典：過去答案 n=36（合格19/不合格17）。重複答案は最新版を採用。n小につき点推定は高くてもCIは広く、確証には今後のサンプル追加が必要（誠実注記）。</a:t>
+              <a:t>出典：過去答案 n=36（合格19/不合格17）。重複答案は最新版を採用。本スコアのみで判別、作文スコアは不使用。n小につき点推定は高くてもCIは広く、確証には今後のサンプル追加が必要（誠実注記）。</a:t>
             </a:r>
             <a:endParaRPr lang="en-US" sz="900" dirty="0"/>
           </a:p>
@@ -2018,7 +1909,7 @@
                 <a:ea typeface="ヒラギノ角ゴシック W6" pitchFamily="34" charset="-122"/>
                 <a:cs typeface="ヒラギノ角ゴシック W6" pitchFamily="34" charset="-120"/>
               </a:rPr>
-              <a:t>② 増分妥当性 ｜ 循環論法の排除</a:t>
+              <a:t>② 交絡調整 ｜ 属性差の正体</a:t>
             </a:r>
             <a:endParaRPr lang="en-US" sz="1300" dirty="0"/>
           </a:p>
@@ -2057,7 +1948,7 @@
                 <a:ea typeface="ヒラギノ角ゴシック W6" pitchFamily="34" charset="-122"/>
                 <a:cs typeface="ヒラギノ角ゴシック W6" pitchFamily="34" charset="-120"/>
               </a:rPr>
-              <a:t>作文スコアを「超えて」合否を予測する</a:t>
+              <a:t>属性差（学年・校舎等）は概ね『作文力』で説明できる</a:t>
             </a:r>
             <a:endParaRPr lang="en-US" sz="2400" dirty="0"/>
           </a:p>
@@ -2088,7 +1979,7 @@
       </p:sp>
       <p:pic>
         <p:nvPicPr>
-          <p:cNvPr id="6" name="Image 0" descr="fig2_incremental.png">    </p:cNvPr>
+          <p:cNvPr id="6" name="Image 0" descr="fig3_confound.png">    </p:cNvPr>
           <p:cNvPicPr>
             <a:picLocks noChangeAspect="1"/>
           </p:cNvPicPr>
@@ -2103,7 +1994,7 @@
         <p:spPr>
           <a:xfrm>
             <a:off x="502920" y="1783080"/>
-            <a:ext cx="5394960" cy="3438144"/>
+            <a:ext cx="5440680" cy="3529584"/>
           </a:xfrm>
           <a:prstGeom prst="rect">
             <a:avLst/>
@@ -2125,8 +2016,8 @@
         </p:nvSpPr>
         <p:spPr>
           <a:xfrm>
-            <a:off x="6126480" y="1691640"/>
-            <a:ext cx="5669280" cy="4114800"/>
+            <a:off x="6172200" y="1645920"/>
+            <a:ext cx="5577840" cy="4114800"/>
           </a:xfrm>
           <a:prstGeom prst="rect">
             <a:avLst/>
@@ -2154,7 +2045,7 @@
                 <a:ea typeface="ヒラギノ角ゴシック W6" pitchFamily="34" charset="-122"/>
                 <a:cs typeface="ヒラギノ角ゴシック W6" pitchFamily="34" charset="-120"/>
               </a:rPr>
-              <a:t>東大スコアは作文スコアを超えて合否を上乗せ予測：尤度比検定 χ²(1)=6.0, p=0.014</a:t>
+              <a:t>作文AIスコアを統制すると、学年・高校ランク・校舎の差は大きく縮小</a:t>
             </a:r>
             <a:endParaRPr lang="en-US" sz="1400" dirty="0"/>
           </a:p>
@@ -2167,7 +2058,7 @@
               <a:buChar char="•"/>
             </a:pPr>
             <a:r>
-              <a:rPr lang="en-US" sz="1300" dirty="0">
+              <a:rPr lang="en-US" sz="1250" dirty="0">
                 <a:solidFill>
                   <a:srgbClr val="1A1A1A"/>
                 </a:solidFill>
@@ -2175,7 +2066,7 @@
                 <a:ea typeface="ヒラギノ角ゴシック W3" pitchFamily="34" charset="-122"/>
                 <a:cs typeface="ヒラギノ角ゴシック W3" pitchFamily="34" charset="-120"/>
               </a:rPr>
-              <a:t>逆に、作文スコアは東大スコアを超える上乗せ予測なし：χ²(1)=2.4, p=0.124</a:t>
+              <a:t>学年：偏相関 0.28→0.10／高校ランク：0.07→0.03／校舎(早稲田塾) 生差+17点→統制後ほぼ0</a:t>
             </a:r>
             <a:endParaRPr lang="en-US" sz="1400" dirty="0"/>
           </a:p>
@@ -2188,7 +2079,7 @@
               <a:buChar char="•"/>
             </a:pPr>
             <a:r>
-              <a:rPr lang="en-US" sz="1300" dirty="0">
+              <a:rPr lang="en-US" sz="1250" dirty="0">
                 <a:solidFill>
                   <a:srgbClr val="1A1A1A"/>
                 </a:solidFill>
@@ -2196,7 +2087,7 @@
                 <a:ea typeface="ヒラギノ角ゴシック W3" pitchFamily="34" charset="-122"/>
                 <a:cs typeface="ヒラギノ角ゴシック W3" pitchFamily="34" charset="-120"/>
               </a:rPr>
-              <a:t>汎化性能(LOO交差検証) AUC：東大スコア 0.79 ＞ 作文スコア 0.55（ほぼ偶然）</a:t>
+              <a:t>決め手：同じ属性が「作文スコア」を予測するβ(+0.285)と「東大スコア」を予測するβ(+0.278)はほぼ同一</a:t>
             </a:r>
             <a:endParaRPr lang="en-US" sz="1400" dirty="0"/>
           </a:p>
@@ -2210,8 +2101,8 @@
         </p:nvSpPr>
         <p:spPr>
           <a:xfrm>
-            <a:off x="6126480" y="3977640"/>
-            <a:ext cx="5532120" cy="1920240"/>
+            <a:off x="6172200" y="4114800"/>
+            <a:ext cx="5486400" cy="1783080"/>
           </a:xfrm>
           <a:prstGeom prst="rect">
             <a:avLst/>
@@ -2235,8 +2126,8 @@
         </p:nvSpPr>
         <p:spPr>
           <a:xfrm>
-            <a:off x="6309360" y="4114800"/>
-            <a:ext cx="5212080" cy="1691640"/>
+            <a:off x="6355080" y="4251960"/>
+            <a:ext cx="5166360" cy="1554480"/>
           </a:xfrm>
           <a:prstGeom prst="rect">
             <a:avLst/>
@@ -2260,7 +2151,7 @@
                 <a:ea typeface="ヒラギノ角ゴシック W6" pitchFamily="34" charset="-122"/>
                 <a:cs typeface="ヒラギノ角ゴシック W6" pitchFamily="34" charset="-120"/>
               </a:rPr>
-              <a:t>なぜ重要か　</a:t>
+              <a:t>結論　</a:t>
             </a:r>
             <a:pPr indent="0" marL="0">
               <a:spcAft>
@@ -2277,7 +2168,7 @@
                 <a:ea typeface="ヒラギノ角ゴシック W3" pitchFamily="34" charset="-122"/>
                 <a:cs typeface="ヒラギノ角ゴシック W3" pitchFamily="34" charset="-120"/>
               </a:rPr>
-              <a:t>東大スコアは作文スコアと相関0.78。「単なる作文点の言い換え」なら妥当性の証明にならない。</a:t>
+              <a:t>「高3が高い」「早稲田塾が高い」等の属性差は、その層が作文を上手く書くことの反映。</a:t>
             </a:r>
             <a:endParaRPr lang="en-US" sz="1300" dirty="0"/>
           </a:p>
@@ -2294,7 +2185,7 @@
                 <a:ea typeface="ヒラギノ角ゴシック W3" pitchFamily="34" charset="-122"/>
                 <a:cs typeface="ヒラギノ角ゴシック W3" pitchFamily="34" charset="-120"/>
               </a:rPr>
-              <a:t>本検証は、作文点を統計的に差し引いてもなお合否を予測する=東大推薦に固有のシグナルを捉えていることを示す。</a:t>
+              <a:t>＝属性比較だけでは妥当性を示せない。だからこそ①（合否との直接照合）が本命となる。</a:t>
             </a:r>
             <a:endParaRPr lang="en-US" sz="1300" dirty="0"/>
           </a:p>
@@ -2333,7 +2224,7 @@
                 <a:ea typeface="ヒラギノ角ゴシック W3" pitchFamily="34" charset="-122"/>
                 <a:cs typeface="ヒラギノ角ゴシック W3" pitchFamily="34" charset="-120"/>
               </a:rPr>
-              <a:t>出典：過去答案 n=36。ロジスティック回帰（合否～東大スコア／作文スコア／両方）。LOOは leave-one-out 交差検証AUC。</a:t>
+              <a:t>出典：現役 n=582（学年589・高校ランク582・校舎374で実施）。現行基準の作文AIスコアを共変量に統制。性別は提供データに無し。</a:t>
             </a:r>
             <a:endParaRPr lang="en-US" sz="900" dirty="0"/>
           </a:p>
@@ -2350,412 +2241,6 @@
 <file path=ppt/slides/slide4.xml><?xml version="1.0" encoding="utf-8"?>
 <p:sld xmlns:a="http://schemas.openxmlformats.org/drawingml/2006/main" xmlns:r="http://schemas.openxmlformats.org/officeDocument/2006/relationships" xmlns:p="http://schemas.openxmlformats.org/presentationml/2006/main">
   <p:cSld name="Slide 4">
-    <p:bg>
-      <p:bgPr>
-        <a:solidFill>
-          <a:srgbClr val="FFFFFF"/>
-        </a:solidFill>
-      </p:bgPr>
-    </p:bg>
-    <p:spTree>
-      <p:nvGrpSpPr>
-        <p:cNvPr id="1" name=""/>
-        <p:cNvGrpSpPr/>
-        <p:nvPr/>
-      </p:nvGrpSpPr>
-      <p:grpSpPr>
-        <a:xfrm>
-          <a:off x="0" y="0"/>
-          <a:ext cx="0" cy="0"/>
-          <a:chOff x="0" y="0"/>
-          <a:chExt cx="0" cy="0"/>
-        </a:xfrm>
-      </p:grpSpPr>
-      <p:sp>
-        <p:nvSpPr>
-          <p:cNvPr id="2" name="Shape 0"/>
-          <p:cNvSpPr/>
-          <p:nvPr/>
-        </p:nvSpPr>
-        <p:spPr>
-          <a:xfrm>
-            <a:off x="0" y="0"/>
-            <a:ext cx="256032" cy="6858000"/>
-          </a:xfrm>
-          <a:prstGeom prst="rect">
-            <a:avLst/>
-          </a:prstGeom>
-          <a:solidFill>
-            <a:srgbClr val="3E8C7C"/>
-          </a:solidFill>
-          <a:ln/>
-        </p:spPr>
-      </p:sp>
-      <p:sp>
-        <p:nvSpPr>
-          <p:cNvPr id="3" name="Text 1"/>
-          <p:cNvSpPr/>
-          <p:nvPr/>
-        </p:nvSpPr>
-        <p:spPr>
-          <a:xfrm>
-            <a:off x="548640" y="310896"/>
-            <a:ext cx="10972800" cy="365760"/>
-          </a:xfrm>
-          <a:prstGeom prst="rect">
-            <a:avLst/>
-          </a:prstGeom>
-          <a:noFill/>
-          <a:ln/>
-        </p:spPr>
-        <p:txBody>
-          <a:bodyPr wrap="square" rtlCol="0" anchor="ctr"/>
-          <a:lstStyle/>
-          <a:p>
-            <a:pPr indent="0" marL="0">
-              <a:buNone/>
-            </a:pPr>
-            <a:r>
-              <a:rPr lang="en-US" sz="1300" spc="100" kern="0" dirty="0">
-                <a:solidFill>
-                  <a:srgbClr val="C2603F"/>
-                </a:solidFill>
-                <a:latin typeface="ヒラギノ角ゴシック W6" pitchFamily="34" charset="0"/>
-                <a:ea typeface="ヒラギノ角ゴシック W6" pitchFamily="34" charset="-122"/>
-                <a:cs typeface="ヒラギノ角ゴシック W6" pitchFamily="34" charset="-120"/>
-              </a:rPr>
-              <a:t>③ 交絡調整 ｜ 属性差の正体</a:t>
-            </a:r>
-            <a:endParaRPr lang="en-US" sz="1300" dirty="0"/>
-          </a:p>
-        </p:txBody>
-      </p:sp>
-      <p:sp>
-        <p:nvSpPr>
-          <p:cNvPr id="4" name="Text 2"/>
-          <p:cNvSpPr/>
-          <p:nvPr/>
-        </p:nvSpPr>
-        <p:spPr>
-          <a:xfrm>
-            <a:off x="548640" y="603504"/>
-            <a:ext cx="11155680" cy="640080"/>
-          </a:xfrm>
-          <a:prstGeom prst="rect">
-            <a:avLst/>
-          </a:prstGeom>
-          <a:noFill/>
-          <a:ln/>
-        </p:spPr>
-        <p:txBody>
-          <a:bodyPr wrap="square" rtlCol="0" anchor="ctr"/>
-          <a:lstStyle/>
-          <a:p>
-            <a:pPr indent="0" marL="0">
-              <a:buNone/>
-            </a:pPr>
-            <a:r>
-              <a:rPr lang="en-US" sz="2400" dirty="0">
-                <a:solidFill>
-                  <a:srgbClr val="2E6457"/>
-                </a:solidFill>
-                <a:latin typeface="ヒラギノ角ゴシック W6" pitchFamily="34" charset="0"/>
-                <a:ea typeface="ヒラギノ角ゴシック W6" pitchFamily="34" charset="-122"/>
-                <a:cs typeface="ヒラギノ角ゴシック W6" pitchFamily="34" charset="-120"/>
-              </a:rPr>
-              <a:t>属性差（学年・校舎等）は概ね『作文力』で説明できる</a:t>
-            </a:r>
-            <a:endParaRPr lang="en-US" sz="2400" dirty="0"/>
-          </a:p>
-        </p:txBody>
-      </p:sp>
-      <p:sp>
-        <p:nvSpPr>
-          <p:cNvPr id="5" name="Shape 3"/>
-          <p:cNvSpPr/>
-          <p:nvPr/>
-        </p:nvSpPr>
-        <p:spPr>
-          <a:xfrm>
-            <a:off x="566928" y="1371600"/>
-            <a:ext cx="11064240" cy="0"/>
-          </a:xfrm>
-          <a:prstGeom prst="line">
-            <a:avLst/>
-          </a:prstGeom>
-          <a:noFill/>
-          <a:ln w="19050">
-            <a:solidFill>
-              <a:srgbClr val="3E8C7C"/>
-            </a:solidFill>
-            <a:prstDash val="solid"/>
-          </a:ln>
-        </p:spPr>
-      </p:sp>
-      <p:pic>
-        <p:nvPicPr>
-          <p:cNvPr id="6" name="Image 0" descr="fig3_confound.png">    </p:cNvPr>
-          <p:cNvPicPr>
-            <a:picLocks noChangeAspect="1"/>
-          </p:cNvPicPr>
-          <p:nvPr/>
-        </p:nvPicPr>
-        <p:blipFill>
-          <a:blip r:embed="rId1"/>
-          <a:stretch>
-            <a:fillRect/>
-          </a:stretch>
-        </p:blipFill>
-        <p:spPr>
-          <a:xfrm>
-            <a:off x="502920" y="1783080"/>
-            <a:ext cx="5440680" cy="3529584"/>
-          </a:xfrm>
-          <a:prstGeom prst="rect">
-            <a:avLst/>
-          </a:prstGeom>
-          <a:effectLst>
-            <a:outerShdw sx="100000" sy="100000" kx="0" ky="0" algn="bl" rotWithShape="0" blurRad="76200" dist="25400" dir="5400000">
-              <a:srgbClr val="BFBFBF">
-                <a:alpha val="35000"/>
-              </a:srgbClr>
-            </a:outerShdw>
-          </a:effectLst>
-        </p:spPr>
-      </p:pic>
-      <p:sp>
-        <p:nvSpPr>
-          <p:cNvPr id="7" name="Text 4"/>
-          <p:cNvSpPr/>
-          <p:nvPr/>
-        </p:nvSpPr>
-        <p:spPr>
-          <a:xfrm>
-            <a:off x="6172200" y="1645920"/>
-            <a:ext cx="5577840" cy="4114800"/>
-          </a:xfrm>
-          <a:prstGeom prst="rect">
-            <a:avLst/>
-          </a:prstGeom>
-          <a:noFill/>
-          <a:ln/>
-        </p:spPr>
-        <p:txBody>
-          <a:bodyPr wrap="square" rtlCol="0" anchor="t"/>
-          <a:lstStyle/>
-          <a:p>
-            <a:pPr marL="177800" indent="-177800">
-              <a:spcAft>
-                <a:spcPts val="800"/>
-              </a:spcAft>
-              <a:buSzPct val="100000"/>
-              <a:buChar char="•"/>
-            </a:pPr>
-            <a:r>
-              <a:rPr lang="en-US" sz="1400" dirty="0">
-                <a:solidFill>
-                  <a:srgbClr val="2E6457"/>
-                </a:solidFill>
-                <a:latin typeface="ヒラギノ角ゴシック W6" pitchFamily="34" charset="0"/>
-                <a:ea typeface="ヒラギノ角ゴシック W6" pitchFamily="34" charset="-122"/>
-                <a:cs typeface="ヒラギノ角ゴシック W6" pitchFamily="34" charset="-120"/>
-              </a:rPr>
-              <a:t>作文AIスコアを統制すると、学年・高校ランク・校舎の差は大きく縮小</a:t>
-            </a:r>
-            <a:endParaRPr lang="en-US" sz="1400" dirty="0"/>
-          </a:p>
-          <a:p>
-            <a:pPr marL="177800" indent="-177800">
-              <a:spcAft>
-                <a:spcPts val="800"/>
-              </a:spcAft>
-              <a:buSzPct val="100000"/>
-              <a:buChar char="•"/>
-            </a:pPr>
-            <a:r>
-              <a:rPr lang="en-US" sz="1250" dirty="0">
-                <a:solidFill>
-                  <a:srgbClr val="1A1A1A"/>
-                </a:solidFill>
-                <a:latin typeface="ヒラギノ角ゴシック W3" pitchFamily="34" charset="0"/>
-                <a:ea typeface="ヒラギノ角ゴシック W3" pitchFamily="34" charset="-122"/>
-                <a:cs typeface="ヒラギノ角ゴシック W3" pitchFamily="34" charset="-120"/>
-              </a:rPr>
-              <a:t>学年：偏相関 0.28→0.10／高校ランク：0.07→0.03／校舎(早稲田塾) 生差+17点→統制後ほぼ0</a:t>
-            </a:r>
-            <a:endParaRPr lang="en-US" sz="1400" dirty="0"/>
-          </a:p>
-          <a:p>
-            <a:pPr marL="177800" indent="-177800">
-              <a:spcAft>
-                <a:spcPts val="800"/>
-              </a:spcAft>
-              <a:buSzPct val="100000"/>
-              <a:buChar char="•"/>
-            </a:pPr>
-            <a:r>
-              <a:rPr lang="en-US" sz="1250" dirty="0">
-                <a:solidFill>
-                  <a:srgbClr val="1A1A1A"/>
-                </a:solidFill>
-                <a:latin typeface="ヒラギノ角ゴシック W3" pitchFamily="34" charset="0"/>
-                <a:ea typeface="ヒラギノ角ゴシック W3" pitchFamily="34" charset="-122"/>
-                <a:cs typeface="ヒラギノ角ゴシック W3" pitchFamily="34" charset="-120"/>
-              </a:rPr>
-              <a:t>決め手：同じ属性が「作文スコア」を予測するβ(+0.285)と「東大スコア」を予測するβ(+0.278)はほぼ同一</a:t>
-            </a:r>
-            <a:endParaRPr lang="en-US" sz="1400" dirty="0"/>
-          </a:p>
-        </p:txBody>
-      </p:sp>
-      <p:sp>
-        <p:nvSpPr>
-          <p:cNvPr id="8" name="Shape 5"/>
-          <p:cNvSpPr/>
-          <p:nvPr/>
-        </p:nvSpPr>
-        <p:spPr>
-          <a:xfrm>
-            <a:off x="6172200" y="4114800"/>
-            <a:ext cx="5486400" cy="1783080"/>
-          </a:xfrm>
-          <a:prstGeom prst="rect">
-            <a:avLst/>
-          </a:prstGeom>
-          <a:solidFill>
-            <a:srgbClr val="E7F1EE"/>
-          </a:solidFill>
-          <a:ln w="12700">
-            <a:solidFill>
-              <a:srgbClr val="3E8C7C"/>
-            </a:solidFill>
-            <a:prstDash val="solid"/>
-          </a:ln>
-        </p:spPr>
-      </p:sp>
-      <p:sp>
-        <p:nvSpPr>
-          <p:cNvPr id="9" name="Text 6"/>
-          <p:cNvSpPr/>
-          <p:nvPr/>
-        </p:nvSpPr>
-        <p:spPr>
-          <a:xfrm>
-            <a:off x="6355080" y="4251960"/>
-            <a:ext cx="5166360" cy="1554480"/>
-          </a:xfrm>
-          <a:prstGeom prst="rect">
-            <a:avLst/>
-          </a:prstGeom>
-          <a:noFill/>
-          <a:ln/>
-        </p:spPr>
-        <p:txBody>
-          <a:bodyPr wrap="square" rtlCol="0" anchor="t"/>
-          <a:lstStyle/>
-          <a:p>
-            <a:pPr indent="0" marL="0">
-              <a:buNone/>
-            </a:pPr>
-            <a:r>
-              <a:rPr lang="en-US" sz="1300" dirty="0">
-                <a:solidFill>
-                  <a:srgbClr val="2E6457"/>
-                </a:solidFill>
-                <a:latin typeface="ヒラギノ角ゴシック W6" pitchFamily="34" charset="0"/>
-                <a:ea typeface="ヒラギノ角ゴシック W6" pitchFamily="34" charset="-122"/>
-                <a:cs typeface="ヒラギノ角ゴシック W6" pitchFamily="34" charset="-120"/>
-              </a:rPr>
-              <a:t>結論　</a:t>
-            </a:r>
-            <a:pPr indent="0" marL="0">
-              <a:spcAft>
-                <a:spcPts val="400"/>
-              </a:spcAft>
-              <a:buNone/>
-            </a:pPr>
-            <a:r>
-              <a:rPr lang="en-US" sz="1250" dirty="0">
-                <a:solidFill>
-                  <a:srgbClr val="1A1A1A"/>
-                </a:solidFill>
-                <a:latin typeface="ヒラギノ角ゴシック W3" pitchFamily="34" charset="0"/>
-                <a:ea typeface="ヒラギノ角ゴシック W3" pitchFamily="34" charset="-122"/>
-                <a:cs typeface="ヒラギノ角ゴシック W3" pitchFamily="34" charset="-120"/>
-              </a:rPr>
-              <a:t>「高3が高い」「早稲田塾が高い」等の属性差は、その層が作文を上手く書くことの反映。</a:t>
-            </a:r>
-            <a:endParaRPr lang="en-US" sz="1300" dirty="0"/>
-          </a:p>
-          <a:p>
-            <a:pPr indent="0" marL="0">
-              <a:buNone/>
-            </a:pPr>
-            <a:r>
-              <a:rPr lang="en-US" sz="1250" dirty="0">
-                <a:solidFill>
-                  <a:srgbClr val="1A1A1A"/>
-                </a:solidFill>
-                <a:latin typeface="ヒラギノ角ゴシック W3" pitchFamily="34" charset="0"/>
-                <a:ea typeface="ヒラギノ角ゴシック W3" pitchFamily="34" charset="-122"/>
-                <a:cs typeface="ヒラギノ角ゴシック W3" pitchFamily="34" charset="-120"/>
-              </a:rPr>
-              <a:t>＝属性比較だけでは妥当性を示せない。だからこそ①②（合否との直接照合）が本命となる。</a:t>
-            </a:r>
-            <a:endParaRPr lang="en-US" sz="1300" dirty="0"/>
-          </a:p>
-        </p:txBody>
-      </p:sp>
-      <p:sp>
-        <p:nvSpPr>
-          <p:cNvPr id="10" name="Text 7"/>
-          <p:cNvSpPr/>
-          <p:nvPr/>
-        </p:nvSpPr>
-        <p:spPr>
-          <a:xfrm>
-            <a:off x="548640" y="6455664"/>
-            <a:ext cx="11155680" cy="292608"/>
-          </a:xfrm>
-          <a:prstGeom prst="rect">
-            <a:avLst/>
-          </a:prstGeom>
-          <a:noFill/>
-          <a:ln/>
-        </p:spPr>
-        <p:txBody>
-          <a:bodyPr wrap="square" rtlCol="0" anchor="ctr"/>
-          <a:lstStyle/>
-          <a:p>
-            <a:pPr indent="0" marL="0">
-              <a:buNone/>
-            </a:pPr>
-            <a:r>
-              <a:rPr lang="en-US" sz="900" dirty="0">
-                <a:solidFill>
-                  <a:srgbClr val="5C6663"/>
-                </a:solidFill>
-                <a:latin typeface="ヒラギノ角ゴシック W3" pitchFamily="34" charset="0"/>
-                <a:ea typeface="ヒラギノ角ゴシック W3" pitchFamily="34" charset="-122"/>
-                <a:cs typeface="ヒラギノ角ゴシック W3" pitchFamily="34" charset="-120"/>
-              </a:rPr>
-              <a:t>出典：現役 n=582（学年589・高校ランク582・校舎374で実施）。性別は提供データに無し。偏相関は作文AIスコアを共変量に統制。</a:t>
-            </a:r>
-            <a:endParaRPr lang="en-US" sz="900" dirty="0"/>
-          </a:p>
-        </p:txBody>
-      </p:sp>
-    </p:spTree>
-  </p:cSld>
-  <p:clrMapOvr>
-    <a:masterClrMapping/>
-  </p:clrMapOvr>
-</p:sld>
-</file>
-
-<file path=ppt/slides/slide5.xml><?xml version="1.0" encoding="utf-8"?>
-<p:sld xmlns:a="http://schemas.openxmlformats.org/drawingml/2006/main" xmlns:r="http://schemas.openxmlformats.org/officeDocument/2006/relationships" xmlns:p="http://schemas.openxmlformats.org/presentationml/2006/main">
-  <p:cSld name="Slide 5">
     <p:bg>
       <p:bgPr>
         <a:solidFill>
@@ -2887,7 +2372,7 @@
         <p:spPr>
           <a:xfrm>
             <a:off x="868680" y="2926080"/>
-            <a:ext cx="10515600" cy="2011680"/>
+            <a:ext cx="10515600" cy="2103120"/>
           </a:xfrm>
           <a:prstGeom prst="rect">
             <a:avLst/>
@@ -2934,7 +2419,7 @@
                 <a:ea typeface="ヒラギノ角ゴシック W3" pitchFamily="34" charset="-122"/>
                 <a:cs typeface="ヒラギノ角ゴシック W3" pitchFamily="34" charset="-120"/>
               </a:rPr>
-              <a:t>・ 作文スコアを統計的に差し引いてもなお合否を上乗せ予測（p=0.014）。単なる作文点ではない。</a:t>
+              <a:t>・ 属性差（学年・校舎等）の正体は概ね作文力。属性比較では示せない妥当性を、実際の合否との直接照合で確認した。</a:t>
             </a:r>
             <a:endParaRPr lang="en-US" sz="1600" dirty="0"/>
           </a:p>
@@ -2951,7 +2436,7 @@
                 <a:ea typeface="ヒラギノ角ゴシック W3" pitchFamily="34" charset="-122"/>
                 <a:cs typeface="ヒラギノ角ゴシック W3" pitchFamily="34" charset="-120"/>
               </a:rPr>
-              <a:t>・ 属性差（学年・校舎等）の正体は概ね作文力。本指標は合否に固有のシグナルを捉えている。</a:t>
+              <a:t>・ 「作文スコアを超える予測（増分妥当性）」は、過去答案の作文スコアが旧採点基準のため保留。現行基準で再採点後に追加検証する。</a:t>
             </a:r>
             <a:endParaRPr lang="en-US" sz="1600" dirty="0"/>
           </a:p>
@@ -2965,8 +2450,8 @@
         </p:nvSpPr>
         <p:spPr>
           <a:xfrm>
-            <a:off x="822960" y="5532120"/>
-            <a:ext cx="10515600" cy="822960"/>
+            <a:off x="822960" y="5623560"/>
+            <a:ext cx="10515600" cy="749808"/>
           </a:xfrm>
           <a:prstGeom prst="rect">
             <a:avLst/>
@@ -2985,8 +2470,8 @@
         </p:nvSpPr>
         <p:spPr>
           <a:xfrm>
-            <a:off x="1005840" y="5605272"/>
-            <a:ext cx="10149840" cy="676656"/>
+            <a:off x="1005840" y="5687568"/>
+            <a:ext cx="10149840" cy="621792"/>
           </a:xfrm>
           <a:prstGeom prst="rect">
             <a:avLst/>
